--- a/assets/pptx/catalog-615.pptx
+++ b/assets/pptx/catalog-615.pptx
@@ -3247,7 +3247,7 @@
                 <a:ea typeface="Ebrima"/>
                 <a:cs typeface="Ebrima"/>
               </a:rPr>
-              <a:t>- መኖር ከአንተ ጋራ ነው እንጂ (2x)</a:t>
+              <a:t>- መኖር ከአንተ ጋራ ነው እንጂ 2x</a:t>
             </a:r>
           </a:p>
           <a:p>
@@ -3265,7 +3265,7 @@
                 <a:ea typeface="Ebrima"/>
                 <a:cs typeface="Ebrima"/>
               </a:rPr>
-              <a:t>የማትጠገብ ወዳጅ (2x)</a:t>
+              <a:t>የማትጠገብ ወዳጅ 2x</a:t>
             </a:r>
           </a:p>
           <a:p>
@@ -3283,7 +3283,7 @@
                 <a:ea typeface="Ebrima"/>
                 <a:cs typeface="Ebrima"/>
               </a:rPr>
-              <a:t>እናገራለሁ እውነት ነው (2x)</a:t>
+              <a:t>እናገራለሁ እውነት ነው 2x</a:t>
             </a:r>
           </a:p>
           <a:p>
@@ -3355,7 +3355,7 @@
                 <a:ea typeface="Ebrima"/>
                 <a:cs typeface="Ebrima"/>
               </a:rPr>
-              <a:t>አምላኬ እንዳንተ ማን ነው (2x)</a:t>
+              <a:t>አምላኬ እንዳንተ ማን ነው 2x</a:t>
             </a:r>
           </a:p>
         </p:txBody>
@@ -3440,7 +3440,7 @@
                 <a:ea typeface="Ebrima"/>
                 <a:cs typeface="Ebrima"/>
               </a:rPr>
-              <a:t>ፍቅርህን ቀምሼ እንጂ አሃሃ (2x)</a:t>
+              <a:t>ፍቅርህን ቀምሼ እንጂ አሃሃ 2x</a:t>
             </a:r>
           </a:p>
           <a:p>
@@ -3458,7 +3458,7 @@
                 <a:ea typeface="Ebrima"/>
                 <a:cs typeface="Ebrima"/>
               </a:rPr>
-              <a:t>ጌታ ቸር ነው (2x)</a:t>
+              <a:t>ጌታ ቸር ነው 2x</a:t>
             </a:r>
           </a:p>
           <a:p>
@@ -3494,7 +3494,7 @@
                 <a:ea typeface="Ebrima"/>
                 <a:cs typeface="Ebrima"/>
               </a:rPr>
-              <a:t>ጌታ ቸር ነው (2x)</a:t>
+              <a:t>ጌታ ቸር ነው 2x</a:t>
             </a:r>
           </a:p>
           <a:p>
@@ -3579,7 +3579,7 @@
                 <a:ea typeface="Ebrima"/>
                 <a:cs typeface="Ebrima"/>
               </a:rPr>
-              <a:t>- መኖር ከአንተ ጋራ ነው እንጂ (2x)</a:t>
+              <a:t>- መኖር ከአንተ ጋራ ነው እንጂ 2x</a:t>
             </a:r>
           </a:p>
           <a:p>
@@ -3597,7 +3597,7 @@
                 <a:ea typeface="Ebrima"/>
                 <a:cs typeface="Ebrima"/>
               </a:rPr>
-              <a:t>የማትጠገብ ወዳጅ (2x)</a:t>
+              <a:t>የማትጠገብ ወዳጅ 2x</a:t>
             </a:r>
           </a:p>
           <a:p>
@@ -3615,7 +3615,7 @@
                 <a:ea typeface="Ebrima"/>
                 <a:cs typeface="Ebrima"/>
               </a:rPr>
-              <a:t>ኦናገራለሁ እውነት ነው (2x)</a:t>
+              <a:t>ኦናገራለሁ እውነት ነው 2x</a:t>
             </a:r>
           </a:p>
           <a:p>
@@ -3687,7 +3687,7 @@
                 <a:ea typeface="Ebrima"/>
                 <a:cs typeface="Ebrima"/>
               </a:rPr>
-              <a:t>አምላኬ እንዳንተ ማን ነው (2x)</a:t>
+              <a:t>አምላኬ እንዳንተ ማን ነው 2x</a:t>
             </a:r>
           </a:p>
         </p:txBody>
@@ -3772,7 +3772,7 @@
                 <a:ea typeface="Ebrima"/>
                 <a:cs typeface="Ebrima"/>
               </a:rPr>
-              <a:t>ምከተልህ ውድጄ አሃሃ (2x)</a:t>
+              <a:t>ምከተልህ ውድጄ አሃሃ 2x</a:t>
             </a:r>
           </a:p>
           <a:p>
@@ -3911,7 +3911,7 @@
                 <a:ea typeface="Ebrima"/>
                 <a:cs typeface="Ebrima"/>
               </a:rPr>
-              <a:t>- መኖር ከአንተ ጋራ ነው እንጂ (2x)</a:t>
+              <a:t>- መኖር ከአንተ ጋራ ነው እንጂ 2x</a:t>
             </a:r>
           </a:p>
           <a:p>
@@ -3929,7 +3929,7 @@
                 <a:ea typeface="Ebrima"/>
                 <a:cs typeface="Ebrima"/>
               </a:rPr>
-              <a:t>የማትጠገብ ወዳጅ (2x)</a:t>
+              <a:t>የማትጠገብ ወዳጅ 2x</a:t>
             </a:r>
           </a:p>
           <a:p>
@@ -3947,7 +3947,7 @@
                 <a:ea typeface="Ebrima"/>
                 <a:cs typeface="Ebrima"/>
               </a:rPr>
-              <a:t>እናገራለሁ እውነት ነው (2x)</a:t>
+              <a:t>እናገራለሁ እውነት ነው 2x</a:t>
             </a:r>
           </a:p>
           <a:p>
@@ -4019,7 +4019,7 @@
                 <a:ea typeface="Ebrima"/>
                 <a:cs typeface="Ebrima"/>
               </a:rPr>
-              <a:t>አምላኬ እንዳንተ ማን ነው (2x)</a:t>
+              <a:t>አምላኬ እንዳንተ ማን ነው 2x</a:t>
             </a:r>
           </a:p>
         </p:txBody>
@@ -4104,7 +4104,7 @@
                 <a:ea typeface="Ebrima"/>
                 <a:cs typeface="Ebrima"/>
               </a:rPr>
-              <a:t>ክበር እንጂ ምን ልበል አሃሃ (2x)</a:t>
+              <a:t>ክበር እንጂ ምን ልበል አሃሃ 2x</a:t>
             </a:r>
           </a:p>
           <a:p>
@@ -4243,7 +4243,7 @@
                 <a:ea typeface="Ebrima"/>
                 <a:cs typeface="Ebrima"/>
               </a:rPr>
-              <a:t>- መኖር ከአንተ ጋራ ነው እንጂ (2x)</a:t>
+              <a:t>- መኖር ከአንተ ጋራ ነው እንጂ 2x</a:t>
             </a:r>
           </a:p>
           <a:p>
@@ -4261,7 +4261,7 @@
                 <a:ea typeface="Ebrima"/>
                 <a:cs typeface="Ebrima"/>
               </a:rPr>
-              <a:t>የማትጠገብ ወዳጅ (2x)</a:t>
+              <a:t>የማትጠገብ ወዳጅ 2x</a:t>
             </a:r>
           </a:p>
           <a:p>
@@ -4279,7 +4279,7 @@
                 <a:ea typeface="Ebrima"/>
                 <a:cs typeface="Ebrima"/>
               </a:rPr>
-              <a:t>እናገራለሁ እውነት ነው (2x)</a:t>
+              <a:t>እናገራለሁ እውነት ነው 2x</a:t>
             </a:r>
           </a:p>
           <a:p>
@@ -4351,7 +4351,7 @@
                 <a:ea typeface="Ebrima"/>
                 <a:cs typeface="Ebrima"/>
               </a:rPr>
-              <a:t>አምላኬ እንዳንተ ማን ነው (2x)</a:t>
+              <a:t>አምላኬ እንዳንተ ማን ነው 2x</a:t>
             </a:r>
           </a:p>
         </p:txBody>
